--- a/App_Description_MoneTV_filled.pptx
+++ b/App_Description_MoneTV_filled.pptx
@@ -6,7 +6,7 @@
     <p:sldMasterId id="2147483661" r:id="rId2"/>
   </p:sldMasterIdLst>
   <p:notesMasterIdLst>
-    <p:notesMasterId r:id="rId15"/>
+    <p:notesMasterId r:id="rId16"/>
   </p:notesMasterIdLst>
   <p:sldIdLst>
     <p:sldId id="257" r:id="rId3"/>
@@ -19,18 +19,19 @@
     <p:sldId id="264" r:id="rId10"/>
     <p:sldId id="268" r:id="rId11"/>
     <p:sldId id="265" r:id="rId12"/>
-    <p:sldId id="266" r:id="rId13"/>
-    <p:sldId id="267" r:id="rId14"/>
+    <p:sldId id="269" r:id="rId13"/>
+    <p:sldId id="266" r:id="rId14"/>
+    <p:sldId id="267" r:id="rId15"/>
   </p:sldIdLst>
   <p:sldSz cx="9144000" cy="6858000" type="screen4x3"/>
   <p:notesSz cx="6858000" cy="9144000"/>
   <p:embeddedFontLst>
     <p:embeddedFont>
       <p:font typeface="Constantia" panose="02030602050306030303" pitchFamily="18" charset="0"/>
-      <p:regular r:id="rId16"/>
-      <p:bold r:id="rId17"/>
-      <p:italic r:id="rId18"/>
-      <p:boldItalic r:id="rId19"/>
+      <p:regular r:id="rId17"/>
+      <p:bold r:id="rId18"/>
+      <p:italic r:id="rId19"/>
+      <p:boldItalic r:id="rId20"/>
     </p:embeddedFont>
   </p:embeddedFontLst>
   <p:defaultTextStyle>
@@ -263,30 +264,6 @@
     </a:lvl9pPr>
   </p:defaultTextStyle>
   <p:extLst>
-    <p:ext uri="{521415D9-36F7-43E2-AB2F-B90AF26B5E84}">
-      <p14:sectionLst xmlns:p14="http://schemas.microsoft.com/office/powerpoint/2010/main">
-        <p14:section name="默认节" id="{D2195DBF-0644-49C4-A861-ED347329731E}">
-          <p14:sldIdLst>
-            <p14:sldId id="257"/>
-            <p14:sldId id="258"/>
-            <p14:sldId id="259"/>
-            <p14:sldId id="260"/>
-            <p14:sldId id="261"/>
-            <p14:sldId id="262"/>
-            <p14:sldId id="263"/>
-            <p14:sldId id="264"/>
-            <p14:sldId id="268"/>
-          </p14:sldIdLst>
-        </p14:section>
-        <p14:section name="无标题节" id="{16519922-38BD-463B-8EA7-CF0E5631AAB4}">
-          <p14:sldIdLst>
-            <p14:sldId id="265"/>
-            <p14:sldId id="266"/>
-            <p14:sldId id="267"/>
-          </p14:sldIdLst>
-        </p14:section>
-      </p14:sectionLst>
-    </p:ext>
     <p:ext uri="{EFAFB233-063F-42B5-8137-9DF3F51BA10A}">
       <p15:sldGuideLst xmlns:p15="http://schemas.microsoft.com/office/powerpoint/2012/main">
         <p15:guide id="1" orient="horz" pos="2160">
@@ -855,6 +832,237 @@
   <p:cSld>
     <p:spTree>
       <p:nvGrpSpPr>
+        <p:cNvPr id="1" name="Shape 189"/>
+        <p:cNvGrpSpPr/>
+        <p:nvPr/>
+      </p:nvGrpSpPr>
+      <p:grpSpPr>
+        <a:xfrm>
+          <a:off x="0" y="0"/>
+          <a:ext cx="0" cy="0"/>
+          <a:chOff x="0" y="0"/>
+          <a:chExt cx="0" cy="0"/>
+        </a:xfrm>
+      </p:grpSpPr>
+      <p:sp>
+        <p:nvSpPr>
+          <p:cNvPr id="190" name="Google Shape;190;p10:notes"/>
+          <p:cNvSpPr txBox="1">
+            <a:spLocks noGrp="1"/>
+          </p:cNvSpPr>
+          <p:nvPr>
+            <p:ph type="body" idx="1"/>
+          </p:nvPr>
+        </p:nvSpPr>
+        <p:spPr>
+          <a:xfrm>
+            <a:off x="685800" y="4343400"/>
+            <a:ext cx="5486400" cy="4114800"/>
+          </a:xfrm>
+          <a:prstGeom prst="rect">
+            <a:avLst/>
+          </a:prstGeom>
+        </p:spPr>
+        <p:txBody>
+          <a:bodyPr spcFirstLastPara="1" wrap="square" lIns="91425" tIns="91425" rIns="91425" bIns="91425" anchor="t" anchorCtr="0">
+            <a:noAutofit/>
+          </a:bodyPr>
+          <a:lstStyle/>
+          <a:p>
+            <a:pPr marL="0" lvl="0" indent="0" algn="l" rtl="0">
+              <a:spcBef>
+                <a:spcPts val="0"/>
+              </a:spcBef>
+              <a:spcAft>
+                <a:spcPts val="0"/>
+              </a:spcAft>
+              <a:buNone/>
+            </a:pPr>
+            <a:endParaRPr/>
+          </a:p>
+        </p:txBody>
+      </p:sp>
+      <p:sp>
+        <p:nvSpPr>
+          <p:cNvPr id="191" name="Google Shape;191;p10:notes"/>
+          <p:cNvSpPr>
+            <a:spLocks noGrp="1" noRot="1" noChangeAspect="1"/>
+          </p:cNvSpPr>
+          <p:nvPr>
+            <p:ph type="sldImg" idx="2"/>
+          </p:nvPr>
+        </p:nvSpPr>
+        <p:spPr>
+          <a:xfrm>
+            <a:off x="1143000" y="685800"/>
+            <a:ext cx="4572000" cy="3429000"/>
+          </a:xfrm>
+          <a:custGeom>
+            <a:avLst/>
+            <a:gdLst/>
+            <a:ahLst/>
+            <a:cxnLst/>
+            <a:rect l="l" t="t" r="r" b="b"/>
+            <a:pathLst>
+              <a:path w="120000" h="120000" extrusionOk="0">
+                <a:moveTo>
+                  <a:pt x="0" y="0"/>
+                </a:moveTo>
+                <a:lnTo>
+                  <a:pt x="120000" y="0"/>
+                </a:lnTo>
+                <a:lnTo>
+                  <a:pt x="120000" y="120000"/>
+                </a:lnTo>
+                <a:lnTo>
+                  <a:pt x="0" y="120000"/>
+                </a:lnTo>
+                <a:close/>
+              </a:path>
+            </a:pathLst>
+          </a:custGeom>
+        </p:spPr>
+      </p:sp>
+    </p:spTree>
+  </p:cSld>
+  <p:clrMapOvr>
+    <a:masterClrMapping/>
+  </p:clrMapOvr>
+</p:notes>
+</file>
+
+<file path=ppt/notesSlides/notesSlide11.xml><?xml version="1.0" encoding="utf-8"?>
+<p:notes xmlns:a="http://schemas.openxmlformats.org/drawingml/2006/main" xmlns:r="http://schemas.openxmlformats.org/officeDocument/2006/relationships" xmlns:p="http://schemas.openxmlformats.org/presentationml/2006/main" showMasterSp="0" showMasterPhAnim="0">
+  <p:cSld>
+    <p:spTree>
+      <p:nvGrpSpPr>
+        <p:cNvPr id="1" name="Shape 189">
+          <a:extLst>
+            <a:ext uri="{FF2B5EF4-FFF2-40B4-BE49-F238E27FC236}">
+              <a16:creationId xmlns:a16="http://schemas.microsoft.com/office/drawing/2014/main" id="{5488A70A-7012-F1BF-E7E3-E25F86CDD687}"/>
+            </a:ext>
+          </a:extLst>
+        </p:cNvPr>
+        <p:cNvGrpSpPr/>
+        <p:nvPr/>
+      </p:nvGrpSpPr>
+      <p:grpSpPr>
+        <a:xfrm>
+          <a:off x="0" y="0"/>
+          <a:ext cx="0" cy="0"/>
+          <a:chOff x="0" y="0"/>
+          <a:chExt cx="0" cy="0"/>
+        </a:xfrm>
+      </p:grpSpPr>
+      <p:sp>
+        <p:nvSpPr>
+          <p:cNvPr id="190" name="Google Shape;190;p10:notes">
+            <a:extLst>
+              <a:ext uri="{FF2B5EF4-FFF2-40B4-BE49-F238E27FC236}">
+                <a16:creationId xmlns:a16="http://schemas.microsoft.com/office/drawing/2014/main" id="{3063CC5F-2AC5-8845-A949-19D71B623E5F}"/>
+              </a:ext>
+            </a:extLst>
+          </p:cNvPr>
+          <p:cNvSpPr txBox="1">
+            <a:spLocks noGrp="1"/>
+          </p:cNvSpPr>
+          <p:nvPr>
+            <p:ph type="body" idx="1"/>
+          </p:nvPr>
+        </p:nvSpPr>
+        <p:spPr>
+          <a:xfrm>
+            <a:off x="685800" y="4343400"/>
+            <a:ext cx="5486400" cy="4114800"/>
+          </a:xfrm>
+          <a:prstGeom prst="rect">
+            <a:avLst/>
+          </a:prstGeom>
+        </p:spPr>
+        <p:txBody>
+          <a:bodyPr spcFirstLastPara="1" wrap="square" lIns="91425" tIns="91425" rIns="91425" bIns="91425" anchor="t" anchorCtr="0">
+            <a:noAutofit/>
+          </a:bodyPr>
+          <a:lstStyle/>
+          <a:p>
+            <a:pPr marL="0" lvl="0" indent="0" algn="l" rtl="0">
+              <a:spcBef>
+                <a:spcPts val="0"/>
+              </a:spcBef>
+              <a:spcAft>
+                <a:spcPts val="0"/>
+              </a:spcAft>
+              <a:buNone/>
+            </a:pPr>
+            <a:endParaRPr/>
+          </a:p>
+        </p:txBody>
+      </p:sp>
+      <p:sp>
+        <p:nvSpPr>
+          <p:cNvPr id="191" name="Google Shape;191;p10:notes">
+            <a:extLst>
+              <a:ext uri="{FF2B5EF4-FFF2-40B4-BE49-F238E27FC236}">
+                <a16:creationId xmlns:a16="http://schemas.microsoft.com/office/drawing/2014/main" id="{70960C83-B038-DC05-FE86-EDB6931CAAF9}"/>
+              </a:ext>
+            </a:extLst>
+          </p:cNvPr>
+          <p:cNvSpPr>
+            <a:spLocks noGrp="1" noRot="1" noChangeAspect="1"/>
+          </p:cNvSpPr>
+          <p:nvPr>
+            <p:ph type="sldImg" idx="2"/>
+          </p:nvPr>
+        </p:nvSpPr>
+        <p:spPr>
+          <a:xfrm>
+            <a:off x="1143000" y="685800"/>
+            <a:ext cx="4572000" cy="3429000"/>
+          </a:xfrm>
+          <a:custGeom>
+            <a:avLst/>
+            <a:gdLst/>
+            <a:ahLst/>
+            <a:cxnLst/>
+            <a:rect l="l" t="t" r="r" b="b"/>
+            <a:pathLst>
+              <a:path w="120000" h="120000" extrusionOk="0">
+                <a:moveTo>
+                  <a:pt x="0" y="0"/>
+                </a:moveTo>
+                <a:lnTo>
+                  <a:pt x="120000" y="0"/>
+                </a:lnTo>
+                <a:lnTo>
+                  <a:pt x="120000" y="120000"/>
+                </a:lnTo>
+                <a:lnTo>
+                  <a:pt x="0" y="120000"/>
+                </a:lnTo>
+                <a:close/>
+              </a:path>
+            </a:pathLst>
+          </a:custGeom>
+        </p:spPr>
+      </p:sp>
+    </p:spTree>
+    <p:extLst>
+      <p:ext uri="{BB962C8B-B14F-4D97-AF65-F5344CB8AC3E}">
+        <p14:creationId xmlns:p14="http://schemas.microsoft.com/office/powerpoint/2010/main" val="4025645452"/>
+      </p:ext>
+    </p:extLst>
+  </p:cSld>
+  <p:clrMapOvr>
+    <a:masterClrMapping/>
+  </p:clrMapOvr>
+</p:notes>
+</file>
+
+<file path=ppt/notesSlides/notesSlide12.xml><?xml version="1.0" encoding="utf-8"?>
+<p:notes xmlns:a="http://schemas.openxmlformats.org/drawingml/2006/main" xmlns:r="http://schemas.openxmlformats.org/officeDocument/2006/relationships" xmlns:p="http://schemas.openxmlformats.org/presentationml/2006/main" showMasterSp="0" showMasterPhAnim="0">
+  <p:cSld>
+    <p:spTree>
+      <p:nvGrpSpPr>
         <p:cNvPr id="1" name="Shape 196"/>
         <p:cNvGrpSpPr/>
         <p:nvPr/>
@@ -954,7 +1162,7 @@
 </p:notes>
 </file>
 
-<file path=ppt/notesSlides/notesSlide11.xml><?xml version="1.0" encoding="utf-8"?>
+<file path=ppt/notesSlides/notesSlide13.xml><?xml version="1.0" encoding="utf-8"?>
 <p:notes xmlns:a="http://schemas.openxmlformats.org/drawingml/2006/main" xmlns:r="http://schemas.openxmlformats.org/officeDocument/2006/relationships" xmlns:p="http://schemas.openxmlformats.org/presentationml/2006/main" showMasterSp="0" showMasterPhAnim="0">
   <p:cSld>
     <p:spTree>
@@ -1791,7 +1999,13 @@
   <p:cSld>
     <p:spTree>
       <p:nvGrpSpPr>
-        <p:cNvPr id="1" name="Shape 189"/>
+        <p:cNvPr id="1" name="Shape 182">
+          <a:extLst>
+            <a:ext uri="{FF2B5EF4-FFF2-40B4-BE49-F238E27FC236}">
+              <a16:creationId xmlns:a16="http://schemas.microsoft.com/office/drawing/2014/main" id="{04279AB3-5056-1742-09F7-80278C62FE13}"/>
+            </a:ext>
+          </a:extLst>
+        </p:cNvPr>
         <p:cNvGrpSpPr/>
         <p:nvPr/>
       </p:nvGrpSpPr>
@@ -1805,7 +2019,13 @@
       </p:grpSpPr>
       <p:sp>
         <p:nvSpPr>
-          <p:cNvPr id="190" name="Google Shape;190;p10:notes"/>
+          <p:cNvPr id="183" name="Google Shape;183;p9:notes">
+            <a:extLst>
+              <a:ext uri="{FF2B5EF4-FFF2-40B4-BE49-F238E27FC236}">
+                <a16:creationId xmlns:a16="http://schemas.microsoft.com/office/drawing/2014/main" id="{A48A80BA-734A-463E-BCA2-E57C6A0CB721}"/>
+              </a:ext>
+            </a:extLst>
+          </p:cNvPr>
           <p:cNvSpPr txBox="1">
             <a:spLocks noGrp="1"/>
           </p:cNvSpPr>
@@ -1843,7 +2063,13 @@
       </p:sp>
       <p:sp>
         <p:nvSpPr>
-          <p:cNvPr id="191" name="Google Shape;191;p10:notes"/>
+          <p:cNvPr id="184" name="Google Shape;184;p9:notes">
+            <a:extLst>
+              <a:ext uri="{FF2B5EF4-FFF2-40B4-BE49-F238E27FC236}">
+                <a16:creationId xmlns:a16="http://schemas.microsoft.com/office/drawing/2014/main" id="{E91185E5-8109-38DE-9D60-E4317678E7F8}"/>
+              </a:ext>
+            </a:extLst>
+          </p:cNvPr>
           <p:cNvSpPr>
             <a:spLocks noGrp="1" noRot="1" noChangeAspect="1"/>
           </p:cNvSpPr>
@@ -1883,6 +2109,11 @@
         </p:spPr>
       </p:sp>
     </p:spTree>
+    <p:extLst>
+      <p:ext uri="{BB962C8B-B14F-4D97-AF65-F5344CB8AC3E}">
+        <p14:creationId xmlns:p14="http://schemas.microsoft.com/office/powerpoint/2010/main" val="803241909"/>
+      </p:ext>
+    </p:extLst>
   </p:cSld>
   <p:clrMapOvr>
     <a:masterClrMapping/>
@@ -15142,6 +15373,72 @@
   <p:cSld>
     <p:spTree>
       <p:nvGrpSpPr>
+        <p:cNvPr id="1" name="Shape 192">
+          <a:extLst>
+            <a:ext uri="{FF2B5EF4-FFF2-40B4-BE49-F238E27FC236}">
+              <a16:creationId xmlns:a16="http://schemas.microsoft.com/office/drawing/2014/main" id="{F713E210-A873-B25C-0C70-95858FBDF20E}"/>
+            </a:ext>
+          </a:extLst>
+        </p:cNvPr>
+        <p:cNvGrpSpPr/>
+        <p:nvPr/>
+      </p:nvGrpSpPr>
+      <p:grpSpPr>
+        <a:xfrm>
+          <a:off x="0" y="0"/>
+          <a:ext cx="0" cy="0"/>
+          <a:chOff x="0" y="0"/>
+          <a:chExt cx="0" cy="0"/>
+        </a:xfrm>
+      </p:grpSpPr>
+      <p:pic>
+        <p:nvPicPr>
+          <p:cNvPr id="195" name="Picture 194" descr="09-menu-function-collage.jpg">
+            <a:extLst>
+              <a:ext uri="{FF2B5EF4-FFF2-40B4-BE49-F238E27FC236}">
+                <a16:creationId xmlns:a16="http://schemas.microsoft.com/office/drawing/2014/main" id="{2FBADCD9-C578-234D-069C-9607A19B5066}"/>
+              </a:ext>
+            </a:extLst>
+          </p:cNvPr>
+          <p:cNvPicPr>
+            <a:picLocks noChangeAspect="1"/>
+          </p:cNvPicPr>
+          <p:nvPr/>
+        </p:nvPicPr>
+        <p:blipFill>
+          <a:blip r:embed="rId3"/>
+          <a:stretch>
+            <a:fillRect/>
+          </a:stretch>
+        </p:blipFill>
+        <p:spPr>
+          <a:xfrm>
+            <a:off x="0" y="1199626"/>
+            <a:ext cx="9199392" cy="4189009"/>
+          </a:xfrm>
+          <a:prstGeom prst="rect">
+            <a:avLst/>
+          </a:prstGeom>
+        </p:spPr>
+      </p:pic>
+    </p:spTree>
+    <p:extLst>
+      <p:ext uri="{BB962C8B-B14F-4D97-AF65-F5344CB8AC3E}">
+        <p14:creationId xmlns:p14="http://schemas.microsoft.com/office/powerpoint/2010/main" val="301355247"/>
+      </p:ext>
+    </p:extLst>
+  </p:cSld>
+  <p:clrMapOvr>
+    <a:masterClrMapping/>
+  </p:clrMapOvr>
+</p:sld>
+</file>
+
+<file path=ppt/slides/slide12.xml><?xml version="1.0" encoding="utf-8"?>
+<p:sld xmlns:a="http://schemas.openxmlformats.org/drawingml/2006/main" xmlns:r="http://schemas.openxmlformats.org/officeDocument/2006/relationships" xmlns:p="http://schemas.openxmlformats.org/presentationml/2006/main">
+  <p:cSld>
+    <p:spTree>
+      <p:nvGrpSpPr>
         <p:cNvPr id="1" name="Shape 199"/>
         <p:cNvGrpSpPr/>
         <p:nvPr/>
@@ -15234,7 +15531,7 @@
                   <a:srgbClr val="222222"/>
                 </a:solidFill>
               </a:rPr>
-              <a:t>No custom remote-control key remapping is implemented in the current release.</a:t>
+              <a:t>The current release follows Samsung TV Return key policy.</a:t>
             </a:r>
             <a:endParaRPr sz="2200" i="1">
               <a:solidFill>
@@ -15249,7 +15546,37 @@
                   <a:srgbClr val="222222"/>
                 </a:solidFill>
               </a:rPr>
-              <a:t>Standard Samsung TV navigation behavior is used.</a:t>
+              <a:t>Home page: Return opens the exit confirmation popup.</a:t>
+            </a:r>
+          </a:p>
+          <a:p>
+            <a:r>
+              <a:rPr sz="1800" b="0">
+                <a:solidFill>
+                  <a:srgbClr val="222222"/>
+                </a:solidFill>
+              </a:rPr>
+              <a:t>Exit popup open: Return closes the popup first.</a:t>
+            </a:r>
+          </a:p>
+          <a:p>
+            <a:r>
+              <a:rPr sz="1800" b="0">
+                <a:solidFill>
+                  <a:srgbClr val="222222"/>
+                </a:solidFill>
+              </a:rPr>
+              <a:t>Discover / Detail / Player pages: Return navigates to the previous page.</a:t>
+            </a:r>
+          </a:p>
+          <a:p>
+            <a:r>
+              <a:rPr sz="1800" b="0">
+                <a:solidFill>
+                  <a:srgbClr val="222222"/>
+                </a:solidFill>
+              </a:rPr>
+              <a:t>The dedicated EXIT key uses the Samsung TV platform default behavior.</a:t>
             </a:r>
           </a:p>
         </p:txBody>
@@ -15262,7 +15589,7 @@
         </p:nvGraphicFramePr>
         <p:xfrm>
           <a:off x="539552" y="2492896"/>
-          <a:ext cx="7920875" cy="3933615"/>
+          <a:ext cx="7920875" cy="4199535"/>
         </p:xfrm>
         <a:graphic>
           <a:graphicData uri="http://schemas.openxmlformats.org/drawingml/2006/table">
@@ -15975,7 +16302,339 @@
                     <a:p>
                       <a:r>
                         <a:rPr sz="1100" b="0"/>
-                        <a:t>BACK / RETURN</a:t>
+                        <a:t>RETURN on Home</a:t>
+                      </a:r>
+                    </a:p>
+                  </a:txBody>
+                  <a:tcPr marL="36000" marR="36000" marT="36000" marB="36000">
+                    <a:lnL w="9525" cap="flat" cmpd="sng">
+                      <a:solidFill>
+                        <a:srgbClr val="7F7F7F"/>
+                      </a:solidFill>
+                      <a:prstDash val="solid"/>
+                      <a:round/>
+                      <a:headEnd type="none" w="sm" len="sm"/>
+                      <a:tailEnd type="none" w="sm" len="sm"/>
+                    </a:lnL>
+                    <a:lnR w="9525" cap="flat" cmpd="sng">
+                      <a:solidFill>
+                        <a:srgbClr val="7F7F7F"/>
+                      </a:solidFill>
+                      <a:prstDash val="solid"/>
+                      <a:round/>
+                      <a:headEnd type="none" w="sm" len="sm"/>
+                      <a:tailEnd type="none" w="sm" len="sm"/>
+                    </a:lnR>
+                    <a:lnT w="9525" cap="flat" cmpd="sng">
+                      <a:solidFill>
+                        <a:srgbClr val="7F7F7F"/>
+                      </a:solidFill>
+                      <a:prstDash val="solid"/>
+                      <a:round/>
+                      <a:headEnd type="none" w="sm" len="sm"/>
+                      <a:tailEnd type="none" w="sm" len="sm"/>
+                    </a:lnT>
+                    <a:lnB w="9525" cap="flat" cmpd="sng">
+                      <a:solidFill>
+                        <a:srgbClr val="7F7F7F"/>
+                      </a:solidFill>
+                      <a:prstDash val="solid"/>
+                      <a:round/>
+                      <a:headEnd type="none" w="sm" len="sm"/>
+                      <a:tailEnd type="none" w="sm" len="sm"/>
+                    </a:lnB>
+                    <a:solidFill>
+                      <a:schemeClr val="lt1"/>
+                    </a:solidFill>
+                  </a:tcPr>
+                </a:tc>
+                <a:tc>
+                  <a:txBody>
+                    <a:bodyPr/>
+                    <a:lstStyle/>
+                    <a:p>
+                      <a:r>
+                        <a:rPr sz="1100" b="0"/>
+                        <a:t>Open the exit confirmation popup</a:t>
+                      </a:r>
+                    </a:p>
+                  </a:txBody>
+                  <a:tcPr marL="36000" marR="36000" marT="36000" marB="36000">
+                    <a:lnL w="9525" cap="flat" cmpd="sng">
+                      <a:solidFill>
+                        <a:srgbClr val="7F7F7F"/>
+                      </a:solidFill>
+                      <a:prstDash val="solid"/>
+                      <a:round/>
+                      <a:headEnd type="none" w="sm" len="sm"/>
+                      <a:tailEnd type="none" w="sm" len="sm"/>
+                    </a:lnL>
+                    <a:lnR w="9525" cap="flat" cmpd="sng">
+                      <a:solidFill>
+                        <a:srgbClr val="7F7F7F"/>
+                      </a:solidFill>
+                      <a:prstDash val="solid"/>
+                      <a:round/>
+                      <a:headEnd type="none" w="sm" len="sm"/>
+                      <a:tailEnd type="none" w="sm" len="sm"/>
+                    </a:lnR>
+                    <a:lnT w="9525" cap="flat" cmpd="sng">
+                      <a:solidFill>
+                        <a:srgbClr val="7F7F7F"/>
+                      </a:solidFill>
+                      <a:prstDash val="solid"/>
+                      <a:round/>
+                      <a:headEnd type="none" w="sm" len="sm"/>
+                      <a:tailEnd type="none" w="sm" len="sm"/>
+                    </a:lnT>
+                    <a:lnB w="9525" cap="flat" cmpd="sng">
+                      <a:solidFill>
+                        <a:srgbClr val="7F7F7F"/>
+                      </a:solidFill>
+                      <a:prstDash val="solid"/>
+                      <a:round/>
+                      <a:headEnd type="none" w="sm" len="sm"/>
+                      <a:tailEnd type="none" w="sm" len="sm"/>
+                    </a:lnB>
+                    <a:solidFill>
+                      <a:schemeClr val="lt1"/>
+                    </a:solidFill>
+                  </a:tcPr>
+                </a:tc>
+                <a:tc>
+                  <a:txBody>
+                    <a:bodyPr/>
+                    <a:lstStyle/>
+                    <a:p>
+                      <a:r>
+                        <a:rPr sz="1100" b="0"/>
+                        <a:t>Required by Samsung TV Return key policy</a:t>
+                      </a:r>
+                    </a:p>
+                  </a:txBody>
+                  <a:tcPr marL="36000" marR="36000" marT="36000" marB="36000">
+                    <a:lnL w="9525" cap="flat" cmpd="sng">
+                      <a:solidFill>
+                        <a:srgbClr val="7F7F7F"/>
+                      </a:solidFill>
+                      <a:prstDash val="solid"/>
+                      <a:round/>
+                      <a:headEnd type="none" w="sm" len="sm"/>
+                      <a:tailEnd type="none" w="sm" len="sm"/>
+                    </a:lnL>
+                    <a:lnR w="9525" cap="flat" cmpd="sng">
+                      <a:solidFill>
+                        <a:srgbClr val="7F7F7F"/>
+                      </a:solidFill>
+                      <a:prstDash val="solid"/>
+                      <a:round/>
+                      <a:headEnd type="none" w="sm" len="sm"/>
+                      <a:tailEnd type="none" w="sm" len="sm"/>
+                    </a:lnR>
+                    <a:lnT w="9525" cap="flat" cmpd="sng">
+                      <a:solidFill>
+                        <a:srgbClr val="7F7F7F"/>
+                      </a:solidFill>
+                      <a:prstDash val="solid"/>
+                      <a:round/>
+                      <a:headEnd type="none" w="sm" len="sm"/>
+                      <a:tailEnd type="none" w="sm" len="sm"/>
+                    </a:lnT>
+                    <a:lnB w="9525" cap="flat" cmpd="sng">
+                      <a:solidFill>
+                        <a:srgbClr val="7F7F7F"/>
+                      </a:solidFill>
+                      <a:prstDash val="solid"/>
+                      <a:round/>
+                      <a:headEnd type="none" w="sm" len="sm"/>
+                      <a:tailEnd type="none" w="sm" len="sm"/>
+                    </a:lnB>
+                    <a:solidFill>
+                      <a:schemeClr val="lt1"/>
+                    </a:solidFill>
+                  </a:tcPr>
+                </a:tc>
+                <a:extLst>
+                  <a:ext uri="{0D108BD9-81ED-4DB2-BD59-A6C34878D82A}">
+                    <a16:rowId xmlns:a16="http://schemas.microsoft.com/office/drawing/2014/main" val="10004"/>
+                  </a:ext>
+                </a:extLst>
+              </a:tr>
+              <a:tr h="309000">
+                <a:tc>
+                  <a:txBody>
+                    <a:bodyPr/>
+                    <a:lstStyle/>
+                    <a:p>
+                      <a:r>
+                        <a:rPr sz="1100" b="0"/>
+                        <a:t>RETURN on popup</a:t>
+                      </a:r>
+                    </a:p>
+                  </a:txBody>
+                  <a:tcPr marL="36000" marR="36000" marT="36000" marB="36000">
+                    <a:lnL w="9525" cap="flat" cmpd="sng">
+                      <a:solidFill>
+                        <a:srgbClr val="7F7F7F"/>
+                      </a:solidFill>
+                      <a:prstDash val="solid"/>
+                      <a:round/>
+                      <a:headEnd type="none" w="sm" len="sm"/>
+                      <a:tailEnd type="none" w="sm" len="sm"/>
+                    </a:lnL>
+                    <a:lnR w="9525" cap="flat" cmpd="sng">
+                      <a:solidFill>
+                        <a:srgbClr val="7F7F7F"/>
+                      </a:solidFill>
+                      <a:prstDash val="solid"/>
+                      <a:round/>
+                      <a:headEnd type="none" w="sm" len="sm"/>
+                      <a:tailEnd type="none" w="sm" len="sm"/>
+                    </a:lnR>
+                    <a:lnT w="9525" cap="flat" cmpd="sng">
+                      <a:solidFill>
+                        <a:srgbClr val="7F7F7F"/>
+                      </a:solidFill>
+                      <a:prstDash val="solid"/>
+                      <a:round/>
+                      <a:headEnd type="none" w="sm" len="sm"/>
+                      <a:tailEnd type="none" w="sm" len="sm"/>
+                    </a:lnT>
+                    <a:lnB w="9525" cap="flat" cmpd="sng">
+                      <a:solidFill>
+                        <a:srgbClr val="7F7F7F"/>
+                      </a:solidFill>
+                      <a:prstDash val="solid"/>
+                      <a:round/>
+                      <a:headEnd type="none" w="sm" len="sm"/>
+                      <a:tailEnd type="none" w="sm" len="sm"/>
+                    </a:lnB>
+                    <a:solidFill>
+                      <a:schemeClr val="lt1"/>
+                    </a:solidFill>
+                  </a:tcPr>
+                </a:tc>
+                <a:tc>
+                  <a:txBody>
+                    <a:bodyPr/>
+                    <a:lstStyle/>
+                    <a:p>
+                      <a:r>
+                        <a:rPr sz="1100" b="0"/>
+                        <a:t>Close the exit confirmation popup</a:t>
+                      </a:r>
+                    </a:p>
+                  </a:txBody>
+                  <a:tcPr marL="36000" marR="36000" marT="36000" marB="36000">
+                    <a:lnL w="9525" cap="flat" cmpd="sng">
+                      <a:solidFill>
+                        <a:srgbClr val="7F7F7F"/>
+                      </a:solidFill>
+                      <a:prstDash val="solid"/>
+                      <a:round/>
+                      <a:headEnd type="none" w="sm" len="sm"/>
+                      <a:tailEnd type="none" w="sm" len="sm"/>
+                    </a:lnL>
+                    <a:lnR w="9525" cap="flat" cmpd="sng">
+                      <a:solidFill>
+                        <a:srgbClr val="7F7F7F"/>
+                      </a:solidFill>
+                      <a:prstDash val="solid"/>
+                      <a:round/>
+                      <a:headEnd type="none" w="sm" len="sm"/>
+                      <a:tailEnd type="none" w="sm" len="sm"/>
+                    </a:lnR>
+                    <a:lnT w="9525" cap="flat" cmpd="sng">
+                      <a:solidFill>
+                        <a:srgbClr val="7F7F7F"/>
+                      </a:solidFill>
+                      <a:prstDash val="solid"/>
+                      <a:round/>
+                      <a:headEnd type="none" w="sm" len="sm"/>
+                      <a:tailEnd type="none" w="sm" len="sm"/>
+                    </a:lnT>
+                    <a:lnB w="9525" cap="flat" cmpd="sng">
+                      <a:solidFill>
+                        <a:srgbClr val="7F7F7F"/>
+                      </a:solidFill>
+                      <a:prstDash val="solid"/>
+                      <a:round/>
+                      <a:headEnd type="none" w="sm" len="sm"/>
+                      <a:tailEnd type="none" w="sm" len="sm"/>
+                    </a:lnB>
+                    <a:solidFill>
+                      <a:schemeClr val="lt1"/>
+                    </a:solidFill>
+                  </a:tcPr>
+                </a:tc>
+                <a:tc>
+                  <a:txBody>
+                    <a:bodyPr/>
+                    <a:lstStyle/>
+                    <a:p>
+                      <a:r>
+                        <a:rPr sz="1100" b="0"/>
+                        <a:t>The app stays on the Home page</a:t>
+                      </a:r>
+                    </a:p>
+                  </a:txBody>
+                  <a:tcPr marL="36000" marR="36000" marT="36000" marB="36000">
+                    <a:lnL w="9525" cap="flat" cmpd="sng">
+                      <a:solidFill>
+                        <a:srgbClr val="7F7F7F"/>
+                      </a:solidFill>
+                      <a:prstDash val="solid"/>
+                      <a:round/>
+                      <a:headEnd type="none" w="sm" len="sm"/>
+                      <a:tailEnd type="none" w="sm" len="sm"/>
+                    </a:lnL>
+                    <a:lnR w="9525" cap="flat" cmpd="sng">
+                      <a:solidFill>
+                        <a:srgbClr val="7F7F7F"/>
+                      </a:solidFill>
+                      <a:prstDash val="solid"/>
+                      <a:round/>
+                      <a:headEnd type="none" w="sm" len="sm"/>
+                      <a:tailEnd type="none" w="sm" len="sm"/>
+                    </a:lnR>
+                    <a:lnT w="9525" cap="flat" cmpd="sng">
+                      <a:solidFill>
+                        <a:srgbClr val="7F7F7F"/>
+                      </a:solidFill>
+                      <a:prstDash val="solid"/>
+                      <a:round/>
+                      <a:headEnd type="none" w="sm" len="sm"/>
+                      <a:tailEnd type="none" w="sm" len="sm"/>
+                    </a:lnT>
+                    <a:lnB w="9525" cap="flat" cmpd="sng">
+                      <a:solidFill>
+                        <a:srgbClr val="7F7F7F"/>
+                      </a:solidFill>
+                      <a:prstDash val="solid"/>
+                      <a:round/>
+                      <a:headEnd type="none" w="sm" len="sm"/>
+                      <a:tailEnd type="none" w="sm" len="sm"/>
+                    </a:lnB>
+                    <a:solidFill>
+                      <a:schemeClr val="lt1"/>
+                    </a:solidFill>
+                  </a:tcPr>
+                </a:tc>
+                <a:extLst>
+                  <a:ext uri="{0D108BD9-81ED-4DB2-BD59-A6C34878D82A}">
+                    <a16:rowId xmlns:a16="http://schemas.microsoft.com/office/drawing/2014/main" val="10005"/>
+                  </a:ext>
+                </a:extLst>
+              </a:tr>
+              <a:tr h="309000">
+                <a:tc>
+                  <a:txBody>
+                    <a:bodyPr/>
+                    <a:lstStyle/>
+                    <a:p>
+                      <a:r>
+                        <a:rPr sz="1100" b="0"/>
+                        <a:t>RETURN on Discover / Detail / Player</a:t>
                       </a:r>
                     </a:p>
                   </a:txBody>
@@ -16081,7 +16740,7 @@
                     <a:p>
                       <a:r>
                         <a:rPr sz="1100" b="0"/>
-                        <a:t>Standard Samsung TV behavior</a:t>
+                        <a:t>Navigates back within the app flow</a:t>
                       </a:r>
                     </a:p>
                   </a:txBody>
@@ -16129,7 +16788,7 @@
                 </a:tc>
                 <a:extLst>
                   <a:ext uri="{0D108BD9-81ED-4DB2-BD59-A6C34878D82A}">
-                    <a16:rowId xmlns:a16="http://schemas.microsoft.com/office/drawing/2014/main" val="10004"/>
+                    <a16:rowId xmlns:a16="http://schemas.microsoft.com/office/drawing/2014/main" val="10006"/>
                   </a:ext>
                 </a:extLst>
               </a:tr>
@@ -16247,339 +16906,7 @@
                     <a:p>
                       <a:r>
                         <a:rPr sz="1100" b="0"/>
-                        <a:t>Standard Samsung TV behavior</a:t>
-                      </a:r>
-                    </a:p>
-                  </a:txBody>
-                  <a:tcPr marL="36000" marR="36000" marT="36000" marB="36000">
-                    <a:lnL w="9525" cap="flat" cmpd="sng">
-                      <a:solidFill>
-                        <a:srgbClr val="7F7F7F"/>
-                      </a:solidFill>
-                      <a:prstDash val="solid"/>
-                      <a:round/>
-                      <a:headEnd type="none" w="sm" len="sm"/>
-                      <a:tailEnd type="none" w="sm" len="sm"/>
-                    </a:lnL>
-                    <a:lnR w="9525" cap="flat" cmpd="sng">
-                      <a:solidFill>
-                        <a:srgbClr val="7F7F7F"/>
-                      </a:solidFill>
-                      <a:prstDash val="solid"/>
-                      <a:round/>
-                      <a:headEnd type="none" w="sm" len="sm"/>
-                      <a:tailEnd type="none" w="sm" len="sm"/>
-                    </a:lnR>
-                    <a:lnT w="9525" cap="flat" cmpd="sng">
-                      <a:solidFill>
-                        <a:srgbClr val="7F7F7F"/>
-                      </a:solidFill>
-                      <a:prstDash val="solid"/>
-                      <a:round/>
-                      <a:headEnd type="none" w="sm" len="sm"/>
-                      <a:tailEnd type="none" w="sm" len="sm"/>
-                    </a:lnT>
-                    <a:lnB w="9525" cap="flat" cmpd="sng">
-                      <a:solidFill>
-                        <a:srgbClr val="7F7F7F"/>
-                      </a:solidFill>
-                      <a:prstDash val="solid"/>
-                      <a:round/>
-                      <a:headEnd type="none" w="sm" len="sm"/>
-                      <a:tailEnd type="none" w="sm" len="sm"/>
-                    </a:lnB>
-                    <a:solidFill>
-                      <a:schemeClr val="lt1"/>
-                    </a:solidFill>
-                  </a:tcPr>
-                </a:tc>
-                <a:extLst>
-                  <a:ext uri="{0D108BD9-81ED-4DB2-BD59-A6C34878D82A}">
-                    <a16:rowId xmlns:a16="http://schemas.microsoft.com/office/drawing/2014/main" val="10005"/>
-                  </a:ext>
-                </a:extLst>
-              </a:tr>
-              <a:tr h="309000">
-                <a:tc>
-                  <a:txBody>
-                    <a:bodyPr/>
-                    <a:lstStyle/>
-                    <a:p>
-                      <a:r>
-                        <a:rPr sz="1100" b="0"/>
-                        <a:t>PLAY / PAUSE</a:t>
-                      </a:r>
-                    </a:p>
-                  </a:txBody>
-                  <a:tcPr marL="36000" marR="36000" marT="36000" marB="36000">
-                    <a:lnL w="9525" cap="flat" cmpd="sng">
-                      <a:solidFill>
-                        <a:srgbClr val="7F7F7F"/>
-                      </a:solidFill>
-                      <a:prstDash val="solid"/>
-                      <a:round/>
-                      <a:headEnd type="none" w="sm" len="sm"/>
-                      <a:tailEnd type="none" w="sm" len="sm"/>
-                    </a:lnL>
-                    <a:lnR w="9525" cap="flat" cmpd="sng">
-                      <a:solidFill>
-                        <a:srgbClr val="7F7F7F"/>
-                      </a:solidFill>
-                      <a:prstDash val="solid"/>
-                      <a:round/>
-                      <a:headEnd type="none" w="sm" len="sm"/>
-                      <a:tailEnd type="none" w="sm" len="sm"/>
-                    </a:lnR>
-                    <a:lnT w="9525" cap="flat" cmpd="sng">
-                      <a:solidFill>
-                        <a:srgbClr val="7F7F7F"/>
-                      </a:solidFill>
-                      <a:prstDash val="solid"/>
-                      <a:round/>
-                      <a:headEnd type="none" w="sm" len="sm"/>
-                      <a:tailEnd type="none" w="sm" len="sm"/>
-                    </a:lnT>
-                    <a:lnB w="9525" cap="flat" cmpd="sng">
-                      <a:solidFill>
-                        <a:srgbClr val="7F7F7F"/>
-                      </a:solidFill>
-                      <a:prstDash val="solid"/>
-                      <a:round/>
-                      <a:headEnd type="none" w="sm" len="sm"/>
-                      <a:tailEnd type="none" w="sm" len="sm"/>
-                    </a:lnB>
-                    <a:solidFill>
-                      <a:schemeClr val="lt1"/>
-                    </a:solidFill>
-                  </a:tcPr>
-                </a:tc>
-                <a:tc>
-                  <a:txBody>
-                    <a:bodyPr/>
-                    <a:lstStyle/>
-                    <a:p>
-                      <a:r>
-                        <a:rPr sz="1100" b="0"/>
-                        <a:t>Platform default behavior only</a:t>
-                      </a:r>
-                    </a:p>
-                  </a:txBody>
-                  <a:tcPr marL="36000" marR="36000" marT="36000" marB="36000">
-                    <a:lnL w="9525" cap="flat" cmpd="sng">
-                      <a:solidFill>
-                        <a:srgbClr val="7F7F7F"/>
-                      </a:solidFill>
-                      <a:prstDash val="solid"/>
-                      <a:round/>
-                      <a:headEnd type="none" w="sm" len="sm"/>
-                      <a:tailEnd type="none" w="sm" len="sm"/>
-                    </a:lnL>
-                    <a:lnR w="9525" cap="flat" cmpd="sng">
-                      <a:solidFill>
-                        <a:srgbClr val="7F7F7F"/>
-                      </a:solidFill>
-                      <a:prstDash val="solid"/>
-                      <a:round/>
-                      <a:headEnd type="none" w="sm" len="sm"/>
-                      <a:tailEnd type="none" w="sm" len="sm"/>
-                    </a:lnR>
-                    <a:lnT w="9525" cap="flat" cmpd="sng">
-                      <a:solidFill>
-                        <a:srgbClr val="7F7F7F"/>
-                      </a:solidFill>
-                      <a:prstDash val="solid"/>
-                      <a:round/>
-                      <a:headEnd type="none" w="sm" len="sm"/>
-                      <a:tailEnd type="none" w="sm" len="sm"/>
-                    </a:lnT>
-                    <a:lnB w="9525" cap="flat" cmpd="sng">
-                      <a:solidFill>
-                        <a:srgbClr val="7F7F7F"/>
-                      </a:solidFill>
-                      <a:prstDash val="solid"/>
-                      <a:round/>
-                      <a:headEnd type="none" w="sm" len="sm"/>
-                      <a:tailEnd type="none" w="sm" len="sm"/>
-                    </a:lnB>
-                    <a:solidFill>
-                      <a:schemeClr val="lt1"/>
-                    </a:solidFill>
-                  </a:tcPr>
-                </a:tc>
-                <a:tc>
-                  <a:txBody>
-                    <a:bodyPr/>
-                    <a:lstStyle/>
-                    <a:p>
-                      <a:r>
-                        <a:rPr sz="1100" b="0"/>
-                        <a:t>No custom key mapping</a:t>
-                      </a:r>
-                    </a:p>
-                  </a:txBody>
-                  <a:tcPr marL="36000" marR="36000" marT="36000" marB="36000">
-                    <a:lnL w="9525" cap="flat" cmpd="sng">
-                      <a:solidFill>
-                        <a:srgbClr val="7F7F7F"/>
-                      </a:solidFill>
-                      <a:prstDash val="solid"/>
-                      <a:round/>
-                      <a:headEnd type="none" w="sm" len="sm"/>
-                      <a:tailEnd type="none" w="sm" len="sm"/>
-                    </a:lnL>
-                    <a:lnR w="9525" cap="flat" cmpd="sng">
-                      <a:solidFill>
-                        <a:srgbClr val="7F7F7F"/>
-                      </a:solidFill>
-                      <a:prstDash val="solid"/>
-                      <a:round/>
-                      <a:headEnd type="none" w="sm" len="sm"/>
-                      <a:tailEnd type="none" w="sm" len="sm"/>
-                    </a:lnR>
-                    <a:lnT w="9525" cap="flat" cmpd="sng">
-                      <a:solidFill>
-                        <a:srgbClr val="7F7F7F"/>
-                      </a:solidFill>
-                      <a:prstDash val="solid"/>
-                      <a:round/>
-                      <a:headEnd type="none" w="sm" len="sm"/>
-                      <a:tailEnd type="none" w="sm" len="sm"/>
-                    </a:lnT>
-                    <a:lnB w="9525" cap="flat" cmpd="sng">
-                      <a:solidFill>
-                        <a:srgbClr val="7F7F7F"/>
-                      </a:solidFill>
-                      <a:prstDash val="solid"/>
-                      <a:round/>
-                      <a:headEnd type="none" w="sm" len="sm"/>
-                      <a:tailEnd type="none" w="sm" len="sm"/>
-                    </a:lnB>
-                    <a:solidFill>
-                      <a:schemeClr val="lt1"/>
-                    </a:solidFill>
-                  </a:tcPr>
-                </a:tc>
-                <a:extLst>
-                  <a:ext uri="{0D108BD9-81ED-4DB2-BD59-A6C34878D82A}">
-                    <a16:rowId xmlns:a16="http://schemas.microsoft.com/office/drawing/2014/main" val="10006"/>
-                  </a:ext>
-                </a:extLst>
-              </a:tr>
-              <a:tr h="309000">
-                <a:tc>
-                  <a:txBody>
-                    <a:bodyPr/>
-                    <a:lstStyle/>
-                    <a:p>
-                      <a:r>
-                        <a:rPr sz="1100" b="0"/>
-                        <a:t>FAST FORWARD / REWIND</a:t>
-                      </a:r>
-                    </a:p>
-                  </a:txBody>
-                  <a:tcPr marL="36000" marR="36000" marT="36000" marB="36000">
-                    <a:lnL w="9525" cap="flat" cmpd="sng">
-                      <a:solidFill>
-                        <a:srgbClr val="7F7F7F"/>
-                      </a:solidFill>
-                      <a:prstDash val="solid"/>
-                      <a:round/>
-                      <a:headEnd type="none" w="sm" len="sm"/>
-                      <a:tailEnd type="none" w="sm" len="sm"/>
-                    </a:lnL>
-                    <a:lnR w="9525" cap="flat" cmpd="sng">
-                      <a:solidFill>
-                        <a:srgbClr val="7F7F7F"/>
-                      </a:solidFill>
-                      <a:prstDash val="solid"/>
-                      <a:round/>
-                      <a:headEnd type="none" w="sm" len="sm"/>
-                      <a:tailEnd type="none" w="sm" len="sm"/>
-                    </a:lnR>
-                    <a:lnT w="9525" cap="flat" cmpd="sng">
-                      <a:solidFill>
-                        <a:srgbClr val="7F7F7F"/>
-                      </a:solidFill>
-                      <a:prstDash val="solid"/>
-                      <a:round/>
-                      <a:headEnd type="none" w="sm" len="sm"/>
-                      <a:tailEnd type="none" w="sm" len="sm"/>
-                    </a:lnT>
-                    <a:lnB w="9525" cap="flat" cmpd="sng">
-                      <a:solidFill>
-                        <a:srgbClr val="7F7F7F"/>
-                      </a:solidFill>
-                      <a:prstDash val="solid"/>
-                      <a:round/>
-                      <a:headEnd type="none" w="sm" len="sm"/>
-                      <a:tailEnd type="none" w="sm" len="sm"/>
-                    </a:lnB>
-                    <a:solidFill>
-                      <a:schemeClr val="lt1"/>
-                    </a:solidFill>
-                  </a:tcPr>
-                </a:tc>
-                <a:tc>
-                  <a:txBody>
-                    <a:bodyPr/>
-                    <a:lstStyle/>
-                    <a:p>
-                      <a:r>
-                        <a:rPr sz="1100" b="0"/>
-                        <a:t>N/R</a:t>
-                      </a:r>
-                    </a:p>
-                  </a:txBody>
-                  <a:tcPr marL="36000" marR="36000" marT="36000" marB="36000">
-                    <a:lnL w="9525" cap="flat" cmpd="sng">
-                      <a:solidFill>
-                        <a:srgbClr val="7F7F7F"/>
-                      </a:solidFill>
-                      <a:prstDash val="solid"/>
-                      <a:round/>
-                      <a:headEnd type="none" w="sm" len="sm"/>
-                      <a:tailEnd type="none" w="sm" len="sm"/>
-                    </a:lnL>
-                    <a:lnR w="9525" cap="flat" cmpd="sng">
-                      <a:solidFill>
-                        <a:srgbClr val="7F7F7F"/>
-                      </a:solidFill>
-                      <a:prstDash val="solid"/>
-                      <a:round/>
-                      <a:headEnd type="none" w="sm" len="sm"/>
-                      <a:tailEnd type="none" w="sm" len="sm"/>
-                    </a:lnR>
-                    <a:lnT w="9525" cap="flat" cmpd="sng">
-                      <a:solidFill>
-                        <a:srgbClr val="7F7F7F"/>
-                      </a:solidFill>
-                      <a:prstDash val="solid"/>
-                      <a:round/>
-                      <a:headEnd type="none" w="sm" len="sm"/>
-                      <a:tailEnd type="none" w="sm" len="sm"/>
-                    </a:lnT>
-                    <a:lnB w="9525" cap="flat" cmpd="sng">
-                      <a:solidFill>
-                        <a:srgbClr val="7F7F7F"/>
-                      </a:solidFill>
-                      <a:prstDash val="solid"/>
-                      <a:round/>
-                      <a:headEnd type="none" w="sm" len="sm"/>
-                      <a:tailEnd type="none" w="sm" len="sm"/>
-                    </a:lnB>
-                    <a:solidFill>
-                      <a:schemeClr val="lt1"/>
-                    </a:solidFill>
-                  </a:tcPr>
-                </a:tc>
-                <a:tc>
-                  <a:txBody>
-                    <a:bodyPr/>
-                    <a:lstStyle/>
-                    <a:p>
-                      <a:r>
-                        <a:rPr sz="1100" b="0"/>
-                        <a:t>No custom key mapping in current release</a:t>
+                        <a:t>Platform default Samsung TV behavior</a:t>
                       </a:r>
                     </a:p>
                   </a:txBody>
@@ -16639,7 +16966,7 @@
                     <a:p>
                       <a:r>
                         <a:rPr sz="1100" b="0"/>
-                        <a:t>COLOR KEYS</a:t>
+                        <a:t>PLAY / PAUSE / FF / RW</a:t>
                       </a:r>
                     </a:p>
                   </a:txBody>
@@ -16805,7 +17132,7 @@
                     <a:p>
                       <a:r>
                         <a:rPr sz="1100" b="0"/>
-                        <a:t>CHANNEL / NUMBER KEYS</a:t>
+                        <a:t>COLOR / CHANNEL / NUMBER KEYS</a:t>
                       </a:r>
                     </a:p>
                   </a:txBody>
@@ -16975,7 +17302,7 @@
 </p:sld>
 </file>
 
-<file path=ppt/slides/slide12.xml><?xml version="1.0" encoding="utf-8"?>
+<file path=ppt/slides/slide13.xml><?xml version="1.0" encoding="utf-8"?>
 <p:sld xmlns:a="http://schemas.openxmlformats.org/drawingml/2006/main" xmlns:r="http://schemas.openxmlformats.org/officeDocument/2006/relationships" xmlns:p="http://schemas.openxmlformats.org/presentationml/2006/main">
   <p:cSld>
     <p:spTree>
@@ -17198,7 +17525,7 @@
         </p:nvGraphicFramePr>
         <p:xfrm>
           <a:off x="457200" y="1935163"/>
-          <a:ext cx="8229600" cy="1198910"/>
+          <a:ext cx="8229600" cy="1285270"/>
         </p:xfrm>
         <a:graphic>
           <a:graphicData uri="http://schemas.openxmlformats.org/drawingml/2006/table">
@@ -17361,7 +17688,10 @@
                     <a:bodyPr/>
                     <a:lstStyle/>
                     <a:p>
-                      <a:endParaRPr/>
+                      <a:r>
+                        <a:rPr sz="1200" b="0"/>
+                        <a:t>1.0.1</a:t>
+                      </a:r>
                     </a:p>
                   </a:txBody>
                   <a:tcPr marL="91450" marR="91450" marT="45725" marB="45725"/>
@@ -17371,7 +17701,10 @@
                     <a:bodyPr/>
                     <a:lstStyle/>
                     <a:p>
-                      <a:endParaRPr/>
+                      <a:r>
+                        <a:rPr sz="1200" b="0"/>
+                        <a:t>March 24, 2026</a:t>
+                      </a:r>
                     </a:p>
                   </a:txBody>
                   <a:tcPr marL="91450" marR="91450" marT="45725" marB="45725"/>
@@ -17381,7 +17714,10 @@
                     <a:bodyPr/>
                     <a:lstStyle/>
                     <a:p>
-                      <a:endParaRPr/>
+                      <a:r>
+                        <a:rPr sz="1200" b="0"/>
+                        <a:t>Updated return key policy scenarios and screenshots for Samsung review.</a:t>
+                      </a:r>
                     </a:p>
                   </a:txBody>
                   <a:tcPr marL="91450" marR="91450" marT="45725" marB="45725"/>
@@ -17391,7 +17727,10 @@
                     <a:bodyPr/>
                     <a:lstStyle/>
                     <a:p>
-                      <a:endParaRPr/>
+                      <a:r>
+                        <a:rPr sz="1200" b="0"/>
+                        <a:t>db</a:t>
+                      </a:r>
                     </a:p>
                   </a:txBody>
                   <a:tcPr marL="91450" marR="91450" marT="45725" marB="45725"/>
@@ -18535,7 +18874,7 @@
                   <a:srgbClr val="222222"/>
                 </a:solidFill>
               </a:rPr>
-              <a:t>7. Press Back / Return to go to the previous screen.</a:t>
+              <a:t>7. Press Return on Discover / Detail / Player to go to the previous screen.</a:t>
             </a:r>
           </a:p>
           <a:p>
@@ -18657,14 +18996,14 @@
               <a:buChar char="⚫"/>
             </a:pPr>
             <a:r>
-              <a:rPr sz="1800" b="0" dirty="0">
+              <a:rPr sz="1800" b="0">
                 <a:solidFill>
                   <a:srgbClr val="222222"/>
                 </a:solidFill>
               </a:rPr>
-              <a:t>Use Case Title: Browse and play a drama episode</a:t>
+              <a:t>Use Case Title: Return key policy scenarios</a:t>
             </a:r>
-            <a:endParaRPr sz="2400" i="1" dirty="0">
+            <a:endParaRPr sz="2400" i="1">
               <a:solidFill>
                 <a:srgbClr val="54A838"/>
               </a:solidFill>
@@ -18672,16 +19011,36 @@
           </a:p>
           <a:p>
             <a:r>
-              <a:rPr sz="1800" b="0" dirty="0">
+              <a:rPr sz="1800" b="0">
                 <a:solidFill>
                   <a:srgbClr val="222222"/>
                 </a:solidFill>
               </a:rPr>
-              <a:t>Path: Home or Discover -&gt; Detail -&gt; Player</a:t>
+              <a:t>Path 1: Home -&gt; Return -&gt; Exit confirmation popup</a:t>
             </a:r>
           </a:p>
           <a:p>
-            <a:endParaRPr sz="1800" b="0" dirty="0">
+            <a:r>
+              <a:rPr sz="1800" b="0">
+                <a:solidFill>
+                  <a:srgbClr val="222222"/>
+                </a:solidFill>
+              </a:rPr>
+              <a:t>Path 2: Exit popup open -&gt; Return -&gt; Popup closes and Home remains active</a:t>
+            </a:r>
+          </a:p>
+          <a:p>
+            <a:r>
+              <a:rPr sz="1800" b="0">
+                <a:solidFill>
+                  <a:srgbClr val="222222"/>
+                </a:solidFill>
+              </a:rPr>
+              <a:t>Path 3: Discover / Detail / Player -&gt; Return -&gt; Previous page</a:t>
+            </a:r>
+          </a:p>
+          <a:p>
+            <a:endParaRPr sz="1800" b="0">
               <a:solidFill>
                 <a:srgbClr val="222222"/>
               </a:solidFill>
@@ -18689,7 +19048,7 @@
           </a:p>
           <a:p>
             <a:r>
-              <a:rPr sz="1800" b="0" dirty="0">
+              <a:rPr sz="1800" b="0">
                 <a:solidFill>
                   <a:srgbClr val="222222"/>
                 </a:solidFill>
@@ -18699,36 +19058,36 @@
           </a:p>
           <a:p>
             <a:r>
-              <a:rPr sz="1800" b="0" dirty="0">
+              <a:rPr sz="1800" b="0">
                 <a:solidFill>
                   <a:srgbClr val="222222"/>
                 </a:solidFill>
               </a:rPr>
-              <a:t>- The review flow can start from either Home or Discover.</a:t>
+              <a:t>- The app follows Samsung TV Return key policy in the current release.</a:t>
             </a:r>
           </a:p>
           <a:p>
             <a:r>
-              <a:rPr sz="1800" b="0" dirty="0">
+              <a:rPr sz="1800" b="0">
                 <a:solidFill>
                   <a:srgbClr val="222222"/>
                 </a:solidFill>
               </a:rPr>
-              <a:t>- Playback starts after the user selects an episode.</a:t>
+              <a:t>- The Home page does not exit immediately on Return.</a:t>
             </a:r>
           </a:p>
           <a:p>
             <a:r>
-              <a:rPr sz="1800" b="0" dirty="0">
+              <a:rPr sz="1800" b="0">
                 <a:solidFill>
                   <a:srgbClr val="222222"/>
                 </a:solidFill>
               </a:rPr>
-              <a:t>- The screenshots in this document follow the same path.</a:t>
+              <a:t>- The dedicated EXIT key is left to the Samsung TV platform default behavior.</a:t>
             </a:r>
           </a:p>
           <a:p>
-            <a:endParaRPr sz="1800" b="0" dirty="0">
+            <a:endParaRPr sz="1800" b="0">
               <a:solidFill>
                 <a:srgbClr val="222222"/>
               </a:solidFill>
@@ -18736,7 +19095,7 @@
           </a:p>
           <a:p>
             <a:r>
-              <a:rPr sz="1800" b="0" dirty="0">
+              <a:rPr sz="1800" b="0">
                 <a:solidFill>
                   <a:srgbClr val="222222"/>
                 </a:solidFill>
@@ -18746,7 +19105,7 @@
           </a:p>
           <a:p>
             <a:r>
-              <a:rPr sz="1800" b="0" dirty="0">
+              <a:rPr sz="1800" b="0">
                 <a:solidFill>
                   <a:srgbClr val="222222"/>
                 </a:solidFill>
@@ -18769,7 +19128,13 @@
   <p:cSld>
     <p:spTree>
       <p:nvGrpSpPr>
-        <p:cNvPr id="1" name=""/>
+        <p:cNvPr id="1" name="Shape 185">
+          <a:extLst>
+            <a:ext uri="{FF2B5EF4-FFF2-40B4-BE49-F238E27FC236}">
+              <a16:creationId xmlns:a16="http://schemas.microsoft.com/office/drawing/2014/main" id="{35940F44-6A80-9D34-8F90-CF402690E0C0}"/>
+            </a:ext>
+          </a:extLst>
+        </p:cNvPr>
         <p:cNvGrpSpPr/>
         <p:nvPr/>
       </p:nvGrpSpPr>
@@ -18781,74 +19146,30 @@
           <a:chExt cx="0" cy="0"/>
         </a:xfrm>
       </p:grpSpPr>
-      <p:sp>
-        <p:nvSpPr>
-          <p:cNvPr id="2" name="标题 1">
+      <p:pic>
+        <p:nvPicPr>
+          <p:cNvPr id="188" name="Picture 187" descr="10-return-key-policy-collage.jpg">
             <a:extLst>
               <a:ext uri="{FF2B5EF4-FFF2-40B4-BE49-F238E27FC236}">
-                <a16:creationId xmlns:a16="http://schemas.microsoft.com/office/drawing/2014/main" id="{78952341-2BFE-DAAF-1377-3D2B77C092D8}"/>
+                <a16:creationId xmlns:a16="http://schemas.microsoft.com/office/drawing/2014/main" id="{95CDBE88-6055-F6BC-0EF9-61AA54E63840}"/>
               </a:ext>
             </a:extLst>
           </p:cNvPr>
-          <p:cNvSpPr>
-            <a:spLocks noGrp="1"/>
-          </p:cNvSpPr>
-          <p:nvPr>
-            <p:ph type="ctrTitle"/>
-          </p:nvPr>
-        </p:nvSpPr>
-        <p:spPr/>
-        <p:txBody>
-          <a:bodyPr/>
-          <a:lstStyle/>
-          <a:p>
-            <a:endParaRPr lang="zh-CN" altLang="en-US"/>
-          </a:p>
-        </p:txBody>
-      </p:sp>
-      <p:sp>
-        <p:nvSpPr>
-          <p:cNvPr id="3" name="副标题 2">
-            <a:extLst>
-              <a:ext uri="{FF2B5EF4-FFF2-40B4-BE49-F238E27FC236}">
-                <a16:creationId xmlns:a16="http://schemas.microsoft.com/office/drawing/2014/main" id="{CCE3C906-7007-5337-FBC8-3E8C953F4315}"/>
-              </a:ext>
-            </a:extLst>
-          </p:cNvPr>
-          <p:cNvSpPr>
-            <a:spLocks noGrp="1"/>
-          </p:cNvSpPr>
-          <p:nvPr>
-            <p:ph type="subTitle" idx="1"/>
-          </p:nvPr>
-        </p:nvSpPr>
-        <p:spPr/>
-        <p:txBody>
-          <a:bodyPr/>
-          <a:lstStyle/>
-          <a:p>
-            <a:endParaRPr lang="zh-CN" altLang="en-US"/>
-          </a:p>
-        </p:txBody>
-      </p:sp>
-      <p:pic>
-        <p:nvPicPr>
-          <p:cNvPr id="188" name="Picture 187" descr="07-usage-scenario-collage.jpg"/>
           <p:cNvPicPr>
             <a:picLocks noChangeAspect="1"/>
           </p:cNvPicPr>
           <p:nvPr/>
         </p:nvPicPr>
         <p:blipFill>
-          <a:blip r:embed="rId2"/>
+          <a:blip r:embed="rId3"/>
           <a:stretch>
             <a:fillRect/>
           </a:stretch>
         </p:blipFill>
         <p:spPr>
           <a:xfrm>
-            <a:off x="810167" y="1078070"/>
-            <a:ext cx="7523665" cy="4300931"/>
+            <a:off x="609986" y="1174459"/>
+            <a:ext cx="8266989" cy="4725854"/>
           </a:xfrm>
           <a:prstGeom prst="rect">
             <a:avLst/>
@@ -18858,7 +19179,7 @@
     </p:spTree>
     <p:extLst>
       <p:ext uri="{BB962C8B-B14F-4D97-AF65-F5344CB8AC3E}">
-        <p14:creationId xmlns:p14="http://schemas.microsoft.com/office/powerpoint/2010/main" val="2677285783"/>
+        <p14:creationId xmlns:p14="http://schemas.microsoft.com/office/powerpoint/2010/main" val="652572514"/>
       </p:ext>
     </p:extLst>
   </p:cSld>
